--- a/materials/jeopardy/Jeopardy_Interesting_People_A2_fixed.pptx
+++ b/materials/jeopardy/Jeopardy_Interesting_People_A2_fixed.pptx
@@ -15916,7 +15916,7 @@
               </a:defRPr>
             </a:pPr>
             <a:r>
-              <a:t>Who lost his right arm?</a:t>
+              <a:t>Who lost an arm in a battle?</a:t>
             </a:r>
           </a:p>
         </p:txBody>
@@ -20366,7 +20366,7 @@
               </a:defRPr>
             </a:pPr>
             <a:r>
-              <a:t>Who was raised by his strict aunt Mimi?</a:t>
+              <a:t>Who was raised by a strict aunt called Mimi?</a:t>
             </a:r>
           </a:p>
         </p:txBody>
@@ -22591,7 +22591,7 @@
               </a:defRPr>
             </a:pPr>
             <a:r>
-              <a:t>Which person was born on the same day as his son?</a:t>
+              <a:t>Which person had a son with the same birthday?</a:t>
             </a:r>
           </a:p>
         </p:txBody>
@@ -23231,7 +23231,7 @@
               </a:defRPr>
             </a:pPr>
             <a:r>
-              <a:t>Which person continued his career after losing an eye and an arm?</a:t>
+              <a:t>Which person continued working after losing an eye and an arm?</a:t>
             </a:r>
           </a:p>
         </p:txBody>
@@ -24069,7 +24069,7 @@
               </a:defRPr>
             </a:pPr>
             <a:r>
-              <a:t>Who lived with his grandmother when he was a child?</a:t>
+              <a:t>Who was left with a grandmother as a small child?</a:t>
             </a:r>
           </a:p>
         </p:txBody>
